--- a/PyUVM slides.pptx
+++ b/PyUVM slides.pptx
@@ -17360,74 +17360,1047 @@
       </p:grpSpPr>
       <p:sp>
         <p:nvSpPr>
-          <p:cNvPr id="85" name="Google Shape;85;p18"/>
-          <p:cNvSpPr txBox="1">
-            <a:spLocks noGrp="1"/>
-          </p:cNvSpPr>
-          <p:nvPr>
-            <p:ph type="title"/>
-          </p:nvPr>
+          <p:cNvPr id="2" name="Rectangle 1"/>
+          <p:cNvSpPr/>
+          <p:nvPr/>
         </p:nvSpPr>
         <p:spPr>
           <a:xfrm>
-            <a:off x="311700" y="445025"/>
-            <a:ext cx="8520600" cy="572700"/>
+            <a:off x="0" y="0"/>
+            <a:ext cx="9144000" cy="40000"/>
           </a:xfrm>
           <a:prstGeom prst="rect">
             <a:avLst/>
           </a:prstGeom>
+          <a:solidFill>
+            <a:srgbClr val="0097A7"/>
+          </a:solidFill>
+          <a:ln>
+            <a:noFill/>
+          </a:ln>
         </p:spPr>
+        <p:style>
+          <a:lnRef idx="1">
+            <a:schemeClr val="accent1"/>
+          </a:lnRef>
+          <a:fillRef idx="3">
+            <a:schemeClr val="accent1"/>
+          </a:fillRef>
+          <a:effectRef idx="2">
+            <a:schemeClr val="accent1"/>
+          </a:effectRef>
+          <a:fontRef idx="minor">
+            <a:schemeClr val="lt1"/>
+          </a:fontRef>
+        </p:style>
         <p:txBody>
-          <a:bodyPr spcFirstLastPara="1" wrap="square" lIns="91425" tIns="91425" rIns="91425" bIns="91425" anchor="t" anchorCtr="0">
-            <a:normAutofit fontScale="90000"/>
-          </a:bodyPr>
+          <a:bodyPr rtlCol="0" anchor="ctr"/>
           <a:lstStyle/>
           <a:p>
-            <a:pPr marL="0" lvl="0" indent="0" algn="l" rtl="0">
-              <a:spcBef>
-                <a:spcPts val="0"/>
-              </a:spcBef>
-              <a:spcAft>
-                <a:spcPts val="0"/>
-              </a:spcAft>
-              <a:buNone/>
-            </a:pPr>
-            <a:r>
-              <a:rPr lang="en" b="1"/>
-              <a:t>UVM Testbench Architecture</a:t>
-            </a:r>
-            <a:endParaRPr b="1"/>
+            <a:pPr algn="ctr"/>
           </a:p>
         </p:txBody>
       </p:sp>
-      <p:pic>
-        <p:nvPicPr>
-          <p:cNvPr id="86" name="Google Shape;86;p18"/>
-          <p:cNvPicPr preferRelativeResize="0"/>
+      <p:sp>
+        <p:nvSpPr>
+          <p:cNvPr id="3" name="TextBox 2"/>
+          <p:cNvSpPr txBox="1"/>
           <p:nvPr/>
-        </p:nvPicPr>
-        <p:blipFill>
-          <a:blip r:embed="rId3">
-            <a:alphaModFix/>
-          </a:blip>
-          <a:stretch>
-            <a:fillRect/>
-          </a:stretch>
-        </p:blipFill>
+        </p:nvSpPr>
         <p:spPr>
           <a:xfrm>
-            <a:off x="1959725" y="1102825"/>
-            <a:ext cx="5016324" cy="3564650"/>
+            <a:off x="457200" y="200000"/>
+            <a:ext cx="8200000" cy="520000"/>
           </a:xfrm>
           <a:prstGeom prst="rect">
             <a:avLst/>
           </a:prstGeom>
           <a:noFill/>
+        </p:spPr>
+        <p:txBody>
+          <a:bodyPr wrap="square"/>
+          <a:lstStyle/>
+          <a:p>
+            <a:pPr algn="l"/>
+            <a:r>
+              <a:rPr sz="3600" b="1">
+                <a:solidFill>
+                  <a:srgbClr val="212121"/>
+                </a:solidFill>
+                <a:latin typeface="Helvetica Neue"/>
+              </a:rPr>
+              <a:t>Outline</a:t>
+            </a:r>
+          </a:p>
+        </p:txBody>
+      </p:sp>
+      <p:sp>
+        <p:nvSpPr>
+          <p:cNvPr id="4" name="Rectangle 3"/>
+          <p:cNvSpPr/>
+          <p:nvPr/>
+        </p:nvSpPr>
+        <p:spPr>
+          <a:xfrm>
+            <a:off x="457200" y="720000"/>
+            <a:ext cx="600000" cy="30000"/>
+          </a:xfrm>
+          <a:prstGeom prst="rect">
+            <a:avLst/>
+          </a:prstGeom>
+          <a:solidFill>
+            <a:srgbClr val="0097A7"/>
+          </a:solidFill>
           <a:ln>
             <a:noFill/>
           </a:ln>
         </p:spPr>
-      </p:pic>
+        <p:style>
+          <a:lnRef idx="1">
+            <a:schemeClr val="accent1"/>
+          </a:lnRef>
+          <a:fillRef idx="3">
+            <a:schemeClr val="accent1"/>
+          </a:fillRef>
+          <a:effectRef idx="2">
+            <a:schemeClr val="accent1"/>
+          </a:effectRef>
+          <a:fontRef idx="minor">
+            <a:schemeClr val="lt1"/>
+          </a:fontRef>
+        </p:style>
+        <p:txBody>
+          <a:bodyPr rtlCol="0" anchor="ctr"/>
+          <a:lstStyle/>
+          <a:p>
+            <a:pPr algn="ctr"/>
+          </a:p>
+        </p:txBody>
+      </p:sp>
+      <p:sp>
+        <p:nvSpPr>
+          <p:cNvPr id="5" name="Rounded Rectangle 4"/>
+          <p:cNvSpPr/>
+          <p:nvPr/>
+        </p:nvSpPr>
+        <p:spPr>
+          <a:xfrm>
+            <a:off x="497200" y="950000"/>
+            <a:ext cx="3960000" cy="1251166"/>
+          </a:xfrm>
+          <a:prstGeom prst="roundRect">
+            <a:avLst>
+              <a:gd name="adj" fmla="val 8000"/>
+            </a:avLst>
+          </a:prstGeom>
+          <a:solidFill>
+            <a:srgbClr val="E0F7FA"/>
+          </a:solidFill>
+          <a:ln>
+            <a:noFill/>
+          </a:ln>
+        </p:spPr>
+        <p:style>
+          <a:lnRef idx="1">
+            <a:schemeClr val="accent1"/>
+          </a:lnRef>
+          <a:fillRef idx="3">
+            <a:schemeClr val="accent1"/>
+          </a:fillRef>
+          <a:effectRef idx="2">
+            <a:schemeClr val="accent1"/>
+          </a:effectRef>
+          <a:fontRef idx="minor">
+            <a:schemeClr val="lt1"/>
+          </a:fontRef>
+        </p:style>
+        <p:txBody>
+          <a:bodyPr rtlCol="0" anchor="ctr"/>
+          <a:lstStyle/>
+          <a:p>
+            <a:pPr algn="ctr"/>
+          </a:p>
+        </p:txBody>
+      </p:sp>
+      <p:sp>
+        <p:nvSpPr>
+          <p:cNvPr id="6" name="Rectangle 5"/>
+          <p:cNvSpPr/>
+          <p:nvPr/>
+        </p:nvSpPr>
+        <p:spPr>
+          <a:xfrm>
+            <a:off x="457200" y="990000"/>
+            <a:ext cx="40000" cy="1171166"/>
+          </a:xfrm>
+          <a:prstGeom prst="rect">
+            <a:avLst/>
+          </a:prstGeom>
+          <a:solidFill>
+            <a:srgbClr val="0097A7"/>
+          </a:solidFill>
+          <a:ln>
+            <a:noFill/>
+          </a:ln>
+        </p:spPr>
+        <p:style>
+          <a:lnRef idx="1">
+            <a:schemeClr val="accent1"/>
+          </a:lnRef>
+          <a:fillRef idx="3">
+            <a:schemeClr val="accent1"/>
+          </a:fillRef>
+          <a:effectRef idx="2">
+            <a:schemeClr val="accent1"/>
+          </a:effectRef>
+          <a:fontRef idx="minor">
+            <a:schemeClr val="lt1"/>
+          </a:fontRef>
+        </p:style>
+        <p:txBody>
+          <a:bodyPr rtlCol="0" anchor="ctr"/>
+          <a:lstStyle/>
+          <a:p>
+            <a:pPr algn="ctr"/>
+          </a:p>
+        </p:txBody>
+      </p:sp>
+      <p:sp>
+        <p:nvSpPr>
+          <p:cNvPr id="7" name="TextBox 6"/>
+          <p:cNvSpPr txBox="1"/>
+          <p:nvPr/>
+        </p:nvSpPr>
+        <p:spPr>
+          <a:xfrm>
+            <a:off x="517200" y="1395583"/>
+            <a:ext cx="420000" cy="360000"/>
+          </a:xfrm>
+          <a:prstGeom prst="rect">
+            <a:avLst/>
+          </a:prstGeom>
+          <a:noFill/>
+        </p:spPr>
+        <p:txBody>
+          <a:bodyPr wrap="square"/>
+          <a:lstStyle/>
+          <a:p>
+            <a:pPr algn="ctr"/>
+            <a:r>
+              <a:rPr sz="1800" b="1">
+                <a:solidFill>
+                  <a:srgbClr val="0097A7"/>
+                </a:solidFill>
+                <a:latin typeface="Helvetica Neue"/>
+              </a:rPr>
+              <a:t>01</a:t>
+            </a:r>
+          </a:p>
+        </p:txBody>
+      </p:sp>
+      <p:sp>
+        <p:nvSpPr>
+          <p:cNvPr id="8" name="TextBox 7"/>
+          <p:cNvSpPr txBox="1"/>
+          <p:nvPr/>
+        </p:nvSpPr>
+        <p:spPr>
+          <a:xfrm>
+            <a:off x="917200" y="1375583"/>
+            <a:ext cx="3460000" cy="400000"/>
+          </a:xfrm>
+          <a:prstGeom prst="rect">
+            <a:avLst/>
+          </a:prstGeom>
+          <a:noFill/>
+        </p:spPr>
+        <p:txBody>
+          <a:bodyPr wrap="square"/>
+          <a:lstStyle/>
+          <a:p>
+            <a:pPr algn="l"/>
+            <a:r>
+              <a:rPr sz="2200" b="1">
+                <a:solidFill>
+                  <a:srgbClr val="212121"/>
+                </a:solidFill>
+                <a:latin typeface="Helvetica Neue"/>
+              </a:rPr>
+              <a:t>UVM Fundamentals</a:t>
+            </a:r>
+          </a:p>
+        </p:txBody>
+      </p:sp>
+      <p:sp>
+        <p:nvSpPr>
+          <p:cNvPr id="9" name="Rounded Rectangle 8"/>
+          <p:cNvSpPr/>
+          <p:nvPr/>
+        </p:nvSpPr>
+        <p:spPr>
+          <a:xfrm>
+            <a:off x="497200" y="2321166"/>
+            <a:ext cx="3960000" cy="1251166"/>
+          </a:xfrm>
+          <a:prstGeom prst="roundRect">
+            <a:avLst>
+              <a:gd name="adj" fmla="val 8000"/>
+            </a:avLst>
+          </a:prstGeom>
+          <a:solidFill>
+            <a:srgbClr val="E0F7FA"/>
+          </a:solidFill>
+          <a:ln>
+            <a:noFill/>
+          </a:ln>
+        </p:spPr>
+        <p:style>
+          <a:lnRef idx="1">
+            <a:schemeClr val="accent1"/>
+          </a:lnRef>
+          <a:fillRef idx="3">
+            <a:schemeClr val="accent1"/>
+          </a:fillRef>
+          <a:effectRef idx="2">
+            <a:schemeClr val="accent1"/>
+          </a:effectRef>
+          <a:fontRef idx="minor">
+            <a:schemeClr val="lt1"/>
+          </a:fontRef>
+        </p:style>
+        <p:txBody>
+          <a:bodyPr rtlCol="0" anchor="ctr"/>
+          <a:lstStyle/>
+          <a:p>
+            <a:pPr algn="ctr"/>
+          </a:p>
+        </p:txBody>
+      </p:sp>
+      <p:sp>
+        <p:nvSpPr>
+          <p:cNvPr id="10" name="Rectangle 9"/>
+          <p:cNvSpPr/>
+          <p:nvPr/>
+        </p:nvSpPr>
+        <p:spPr>
+          <a:xfrm>
+            <a:off x="457200" y="2361166"/>
+            <a:ext cx="40000" cy="1171166"/>
+          </a:xfrm>
+          <a:prstGeom prst="rect">
+            <a:avLst/>
+          </a:prstGeom>
+          <a:solidFill>
+            <a:srgbClr val="0097A7"/>
+          </a:solidFill>
+          <a:ln>
+            <a:noFill/>
+          </a:ln>
+        </p:spPr>
+        <p:style>
+          <a:lnRef idx="1">
+            <a:schemeClr val="accent1"/>
+          </a:lnRef>
+          <a:fillRef idx="3">
+            <a:schemeClr val="accent1"/>
+          </a:fillRef>
+          <a:effectRef idx="2">
+            <a:schemeClr val="accent1"/>
+          </a:effectRef>
+          <a:fontRef idx="minor">
+            <a:schemeClr val="lt1"/>
+          </a:fontRef>
+        </p:style>
+        <p:txBody>
+          <a:bodyPr rtlCol="0" anchor="ctr"/>
+          <a:lstStyle/>
+          <a:p>
+            <a:pPr algn="ctr"/>
+          </a:p>
+        </p:txBody>
+      </p:sp>
+      <p:sp>
+        <p:nvSpPr>
+          <p:cNvPr id="11" name="TextBox 10"/>
+          <p:cNvSpPr txBox="1"/>
+          <p:nvPr/>
+        </p:nvSpPr>
+        <p:spPr>
+          <a:xfrm>
+            <a:off x="517200" y="2766749"/>
+            <a:ext cx="420000" cy="360000"/>
+          </a:xfrm>
+          <a:prstGeom prst="rect">
+            <a:avLst/>
+          </a:prstGeom>
+          <a:noFill/>
+        </p:spPr>
+        <p:txBody>
+          <a:bodyPr wrap="square"/>
+          <a:lstStyle/>
+          <a:p>
+            <a:pPr algn="ctr"/>
+            <a:r>
+              <a:rPr sz="1800" b="1">
+                <a:solidFill>
+                  <a:srgbClr val="0097A7"/>
+                </a:solidFill>
+                <a:latin typeface="Helvetica Neue"/>
+              </a:rPr>
+              <a:t>02</a:t>
+            </a:r>
+          </a:p>
+        </p:txBody>
+      </p:sp>
+      <p:sp>
+        <p:nvSpPr>
+          <p:cNvPr id="12" name="TextBox 11"/>
+          <p:cNvSpPr txBox="1"/>
+          <p:nvPr/>
+        </p:nvSpPr>
+        <p:spPr>
+          <a:xfrm>
+            <a:off x="917200" y="2746749"/>
+            <a:ext cx="3460000" cy="400000"/>
+          </a:xfrm>
+          <a:prstGeom prst="rect">
+            <a:avLst/>
+          </a:prstGeom>
+          <a:noFill/>
+        </p:spPr>
+        <p:txBody>
+          <a:bodyPr wrap="square"/>
+          <a:lstStyle/>
+          <a:p>
+            <a:pPr algn="l"/>
+            <a:r>
+              <a:rPr sz="2200" b="1">
+                <a:solidFill>
+                  <a:srgbClr val="212121"/>
+                </a:solidFill>
+                <a:latin typeface="Helvetica Neue"/>
+              </a:rPr>
+              <a:t>Advantages &amp; Challenges</a:t>
+            </a:r>
+          </a:p>
+        </p:txBody>
+      </p:sp>
+      <p:sp>
+        <p:nvSpPr>
+          <p:cNvPr id="13" name="Rounded Rectangle 12"/>
+          <p:cNvSpPr/>
+          <p:nvPr/>
+        </p:nvSpPr>
+        <p:spPr>
+          <a:xfrm>
+            <a:off x="497200" y="3692332"/>
+            <a:ext cx="3960000" cy="1251166"/>
+          </a:xfrm>
+          <a:prstGeom prst="roundRect">
+            <a:avLst>
+              <a:gd name="adj" fmla="val 8000"/>
+            </a:avLst>
+          </a:prstGeom>
+          <a:solidFill>
+            <a:srgbClr val="E0F7FA"/>
+          </a:solidFill>
+          <a:ln>
+            <a:noFill/>
+          </a:ln>
+        </p:spPr>
+        <p:style>
+          <a:lnRef idx="1">
+            <a:schemeClr val="accent1"/>
+          </a:lnRef>
+          <a:fillRef idx="3">
+            <a:schemeClr val="accent1"/>
+          </a:fillRef>
+          <a:effectRef idx="2">
+            <a:schemeClr val="accent1"/>
+          </a:effectRef>
+          <a:fontRef idx="minor">
+            <a:schemeClr val="lt1"/>
+          </a:fontRef>
+        </p:style>
+        <p:txBody>
+          <a:bodyPr rtlCol="0" anchor="ctr"/>
+          <a:lstStyle/>
+          <a:p>
+            <a:pPr algn="ctr"/>
+          </a:p>
+        </p:txBody>
+      </p:sp>
+      <p:sp>
+        <p:nvSpPr>
+          <p:cNvPr id="14" name="Rectangle 13"/>
+          <p:cNvSpPr/>
+          <p:nvPr/>
+        </p:nvSpPr>
+        <p:spPr>
+          <a:xfrm>
+            <a:off x="457200" y="3732332"/>
+            <a:ext cx="40000" cy="1171166"/>
+          </a:xfrm>
+          <a:prstGeom prst="rect">
+            <a:avLst/>
+          </a:prstGeom>
+          <a:solidFill>
+            <a:srgbClr val="0097A7"/>
+          </a:solidFill>
+          <a:ln>
+            <a:noFill/>
+          </a:ln>
+        </p:spPr>
+        <p:style>
+          <a:lnRef idx="1">
+            <a:schemeClr val="accent1"/>
+          </a:lnRef>
+          <a:fillRef idx="3">
+            <a:schemeClr val="accent1"/>
+          </a:fillRef>
+          <a:effectRef idx="2">
+            <a:schemeClr val="accent1"/>
+          </a:effectRef>
+          <a:fontRef idx="minor">
+            <a:schemeClr val="lt1"/>
+          </a:fontRef>
+        </p:style>
+        <p:txBody>
+          <a:bodyPr rtlCol="0" anchor="ctr"/>
+          <a:lstStyle/>
+          <a:p>
+            <a:pPr algn="ctr"/>
+          </a:p>
+        </p:txBody>
+      </p:sp>
+      <p:sp>
+        <p:nvSpPr>
+          <p:cNvPr id="15" name="TextBox 14"/>
+          <p:cNvSpPr txBox="1"/>
+          <p:nvPr/>
+        </p:nvSpPr>
+        <p:spPr>
+          <a:xfrm>
+            <a:off x="517200" y="4137915"/>
+            <a:ext cx="420000" cy="360000"/>
+          </a:xfrm>
+          <a:prstGeom prst="rect">
+            <a:avLst/>
+          </a:prstGeom>
+          <a:noFill/>
+        </p:spPr>
+        <p:txBody>
+          <a:bodyPr wrap="square"/>
+          <a:lstStyle/>
+          <a:p>
+            <a:pPr algn="ctr"/>
+            <a:r>
+              <a:rPr sz="1800" b="1">
+                <a:solidFill>
+                  <a:srgbClr val="0097A7"/>
+                </a:solidFill>
+                <a:latin typeface="Helvetica Neue"/>
+              </a:rPr>
+              <a:t>03</a:t>
+            </a:r>
+          </a:p>
+        </p:txBody>
+      </p:sp>
+      <p:sp>
+        <p:nvSpPr>
+          <p:cNvPr id="16" name="TextBox 15"/>
+          <p:cNvSpPr txBox="1"/>
+          <p:nvPr/>
+        </p:nvSpPr>
+        <p:spPr>
+          <a:xfrm>
+            <a:off x="917200" y="4117915"/>
+            <a:ext cx="3460000" cy="400000"/>
+          </a:xfrm>
+          <a:prstGeom prst="rect">
+            <a:avLst/>
+          </a:prstGeom>
+          <a:noFill/>
+        </p:spPr>
+        <p:txBody>
+          <a:bodyPr wrap="square"/>
+          <a:lstStyle/>
+          <a:p>
+            <a:pPr algn="l"/>
+            <a:r>
+              <a:rPr sz="2200" b="1">
+                <a:solidFill>
+                  <a:srgbClr val="212121"/>
+                </a:solidFill>
+                <a:latin typeface="Helvetica Neue"/>
+              </a:rPr>
+              <a:t>Introducing PyUVM</a:t>
+            </a:r>
+          </a:p>
+        </p:txBody>
+      </p:sp>
+      <p:sp>
+        <p:nvSpPr>
+          <p:cNvPr id="17" name="Rounded Rectangle 16"/>
+          <p:cNvSpPr/>
+          <p:nvPr/>
+        </p:nvSpPr>
+        <p:spPr>
+          <a:xfrm>
+            <a:off x="4727200" y="950000"/>
+            <a:ext cx="3960000" cy="1251166"/>
+          </a:xfrm>
+          <a:prstGeom prst="roundRect">
+            <a:avLst>
+              <a:gd name="adj" fmla="val 8000"/>
+            </a:avLst>
+          </a:prstGeom>
+          <a:solidFill>
+            <a:srgbClr val="E0F7FA"/>
+          </a:solidFill>
+          <a:ln>
+            <a:noFill/>
+          </a:ln>
+        </p:spPr>
+        <p:style>
+          <a:lnRef idx="1">
+            <a:schemeClr val="accent1"/>
+          </a:lnRef>
+          <a:fillRef idx="3">
+            <a:schemeClr val="accent1"/>
+          </a:fillRef>
+          <a:effectRef idx="2">
+            <a:schemeClr val="accent1"/>
+          </a:effectRef>
+          <a:fontRef idx="minor">
+            <a:schemeClr val="lt1"/>
+          </a:fontRef>
+        </p:style>
+        <p:txBody>
+          <a:bodyPr rtlCol="0" anchor="ctr"/>
+          <a:lstStyle/>
+          <a:p>
+            <a:pPr algn="ctr"/>
+          </a:p>
+        </p:txBody>
+      </p:sp>
+      <p:sp>
+        <p:nvSpPr>
+          <p:cNvPr id="18" name="Rectangle 17"/>
+          <p:cNvSpPr/>
+          <p:nvPr/>
+        </p:nvSpPr>
+        <p:spPr>
+          <a:xfrm>
+            <a:off x="4687200" y="990000"/>
+            <a:ext cx="40000" cy="1171166"/>
+          </a:xfrm>
+          <a:prstGeom prst="rect">
+            <a:avLst/>
+          </a:prstGeom>
+          <a:solidFill>
+            <a:srgbClr val="0097A7"/>
+          </a:solidFill>
+          <a:ln>
+            <a:noFill/>
+          </a:ln>
+        </p:spPr>
+        <p:style>
+          <a:lnRef idx="1">
+            <a:schemeClr val="accent1"/>
+          </a:lnRef>
+          <a:fillRef idx="3">
+            <a:schemeClr val="accent1"/>
+          </a:fillRef>
+          <a:effectRef idx="2">
+            <a:schemeClr val="accent1"/>
+          </a:effectRef>
+          <a:fontRef idx="minor">
+            <a:schemeClr val="lt1"/>
+          </a:fontRef>
+        </p:style>
+        <p:txBody>
+          <a:bodyPr rtlCol="0" anchor="ctr"/>
+          <a:lstStyle/>
+          <a:p>
+            <a:pPr algn="ctr"/>
+          </a:p>
+        </p:txBody>
+      </p:sp>
+      <p:sp>
+        <p:nvSpPr>
+          <p:cNvPr id="19" name="TextBox 18"/>
+          <p:cNvSpPr txBox="1"/>
+          <p:nvPr/>
+        </p:nvSpPr>
+        <p:spPr>
+          <a:xfrm>
+            <a:off x="4747200" y="1395583"/>
+            <a:ext cx="420000" cy="360000"/>
+          </a:xfrm>
+          <a:prstGeom prst="rect">
+            <a:avLst/>
+          </a:prstGeom>
+          <a:noFill/>
+        </p:spPr>
+        <p:txBody>
+          <a:bodyPr wrap="square"/>
+          <a:lstStyle/>
+          <a:p>
+            <a:pPr algn="ctr"/>
+            <a:r>
+              <a:rPr sz="1800" b="1">
+                <a:solidFill>
+                  <a:srgbClr val="0097A7"/>
+                </a:solidFill>
+                <a:latin typeface="Helvetica Neue"/>
+              </a:rPr>
+              <a:t>04</a:t>
+            </a:r>
+          </a:p>
+        </p:txBody>
+      </p:sp>
+      <p:sp>
+        <p:nvSpPr>
+          <p:cNvPr id="20" name="TextBox 19"/>
+          <p:cNvSpPr txBox="1"/>
+          <p:nvPr/>
+        </p:nvSpPr>
+        <p:spPr>
+          <a:xfrm>
+            <a:off x="5147200" y="1375583"/>
+            <a:ext cx="3460000" cy="400000"/>
+          </a:xfrm>
+          <a:prstGeom prst="rect">
+            <a:avLst/>
+          </a:prstGeom>
+          <a:noFill/>
+        </p:spPr>
+        <p:txBody>
+          <a:bodyPr wrap="square"/>
+          <a:lstStyle/>
+          <a:p>
+            <a:pPr algn="l"/>
+            <a:r>
+              <a:rPr sz="2200" b="1">
+                <a:solidFill>
+                  <a:srgbClr val="212121"/>
+                </a:solidFill>
+                <a:latin typeface="Helvetica Neue"/>
+              </a:rPr>
+              <a:t>Architecture &amp; Components</a:t>
+            </a:r>
+          </a:p>
+        </p:txBody>
+      </p:sp>
+      <p:sp>
+        <p:nvSpPr>
+          <p:cNvPr id="21" name="Rounded Rectangle 20"/>
+          <p:cNvSpPr/>
+          <p:nvPr/>
+        </p:nvSpPr>
+        <p:spPr>
+          <a:xfrm>
+            <a:off x="4727200" y="2321166"/>
+            <a:ext cx="3960000" cy="1251166"/>
+          </a:xfrm>
+          <a:prstGeom prst="roundRect">
+            <a:avLst>
+              <a:gd name="adj" fmla="val 8000"/>
+            </a:avLst>
+          </a:prstGeom>
+          <a:solidFill>
+            <a:srgbClr val="E0F7FA"/>
+          </a:solidFill>
+          <a:ln>
+            <a:noFill/>
+          </a:ln>
+        </p:spPr>
+        <p:style>
+          <a:lnRef idx="1">
+            <a:schemeClr val="accent1"/>
+          </a:lnRef>
+          <a:fillRef idx="3">
+            <a:schemeClr val="accent1"/>
+          </a:fillRef>
+          <a:effectRef idx="2">
+            <a:schemeClr val="accent1"/>
+          </a:effectRef>
+          <a:fontRef idx="minor">
+            <a:schemeClr val="lt1"/>
+          </a:fontRef>
+        </p:style>
+        <p:txBody>
+          <a:bodyPr rtlCol="0" anchor="ctr"/>
+          <a:lstStyle/>
+          <a:p>
+            <a:pPr algn="ctr"/>
+          </a:p>
+        </p:txBody>
+      </p:sp>
+      <p:sp>
+        <p:nvSpPr>
+          <p:cNvPr id="22" name="Rectangle 21"/>
+          <p:cNvSpPr/>
+          <p:nvPr/>
+        </p:nvSpPr>
+        <p:spPr>
+          <a:xfrm>
+            <a:off x="4687200" y="2361166"/>
+            <a:ext cx="40000" cy="1171166"/>
+          </a:xfrm>
+          <a:prstGeom prst="rect">
+            <a:avLst/>
+          </a:prstGeom>
+          <a:solidFill>
+            <a:srgbClr val="0097A7"/>
+          </a:solidFill>
+          <a:ln>
+            <a:noFill/>
+          </a:ln>
+        </p:spPr>
+        <p:style>
+          <a:lnRef idx="1">
+            <a:schemeClr val="accent1"/>
+          </a:lnRef>
+          <a:fillRef idx="3">
+            <a:schemeClr val="accent1"/>
+          </a:fillRef>
+          <a:effectRef idx="2">
+            <a:schemeClr val="accent1"/>
+          </a:effectRef>
+          <a:fontRef idx="minor">
+            <a:schemeClr val="lt1"/>
+          </a:fontRef>
+        </p:style>
+        <p:txBody>
+          <a:bodyPr rtlCol="0" anchor="ctr"/>
+          <a:lstStyle/>
+          <a:p>
+            <a:pPr algn="ctr"/>
+          </a:p>
+        </p:txBody>
+      </p:sp>
+      <p:sp>
+        <p:nvSpPr>
+          <p:cNvPr id="23" name="TextBox 22"/>
+          <p:cNvSpPr txBox="1"/>
+          <p:nvPr/>
+        </p:nvSpPr>
+        <p:spPr>
+          <a:xfrm>
+            <a:off x="4747200" y="2766749"/>
+            <a:ext cx="420000" cy="360000"/>
+          </a:xfrm>
+          <a:prstGeom prst="rect">
+            <a:avLst/>
+          </a:prstGeom>
+          <a:noFill/>
+        </p:spPr>
+        <p:txBody>
+          <a:bodyPr wrap="square"/>
+          <a:lstStyle/>
+          <a:p>
+            <a:pPr algn="ctr"/>
+            <a:r>
+              <a:rPr sz="1800" b="1">
+                <a:solidFill>
+                  <a:srgbClr val="0097A7"/>
+                </a:solidFill>
+                <a:latin typeface="Helvetica Neue"/>
+              </a:rPr>
+              <a:t>05</a:t>
+            </a:r>
+          </a:p>
+        </p:txBody>
+      </p:sp>
+      <p:sp>
+        <p:nvSpPr>
+          <p:cNvPr id="24" name="TextBox 23"/>
+          <p:cNvSpPr txBox="1"/>
+          <p:nvPr/>
+        </p:nvSpPr>
+        <p:spPr>
+          <a:xfrm>
+            <a:off x="5147200" y="2746749"/>
+            <a:ext cx="3460000" cy="400000"/>
+          </a:xfrm>
+          <a:prstGeom prst="rect">
+            <a:avLst/>
+          </a:prstGeom>
+          <a:noFill/>
+        </p:spPr>
+        <p:txBody>
+          <a:bodyPr wrap="square"/>
+          <a:lstStyle/>
+          <a:p>
+            <a:pPr algn="l"/>
+            <a:r>
+              <a:rPr sz="2200" b="1">
+                <a:solidFill>
+                  <a:srgbClr val="212121"/>
+                </a:solidFill>
+                <a:latin typeface="Helvetica Neue"/>
+              </a:rPr>
+              <a:t>Phases, TLM &amp; Configuration</a:t>
+            </a:r>
+          </a:p>
+        </p:txBody>
+      </p:sp>
+      <p:sp>
+        <p:nvSpPr>
+          <p:cNvPr id="25" name="Rounded Rectangle 24"/>
+          <p:cNvSpPr/>
+          <p:nvPr/>
+        </p:nvSpPr>
+        <p:spPr>
+          <a:xfrm>
+            <a:off x="4727200" y="3692332"/>
+            <a:ext cx="3960000" cy="1251166"/>
+          </a:xfrm>
+          <a:prstGeom prst="roundRect">
+            <a:avLst>
+              <a:gd name="adj" fmla="val 8000"/>
+            </a:avLst>
+          </a:prstGeom>
+          <a:solidFill>
+            <a:srgbClr val="E0F7FA"/>
+          </a:solidFill>
+          <a:ln>
+            <a:noFill/>
+          </a:ln>
+        </p:spPr>
+        <p:style>
+          <a:lnRef idx="1">
+            <a:schemeClr val="accent1"/>
+          </a:lnRef>
+          <a:fillRef idx="3">
+            <a:schemeClr val="accent1"/>
+          </a:fillRef>
+          <a:effectRef idx="2">
+            <a:schemeClr val="accent1"/>
+          </a:effectRef>
+          <a:fontRef idx="minor">
+            <a:schemeClr val="lt1"/>
+          </a:fontRef>
+        </p:style>
+        <p:txBody>
+          <a:bodyPr rtlCol="0" anchor="ctr"/>
+          <a:lstStyle/>
+          <a:p>
+            <a:pPr algn="ctr"/>
+          </a:p>
+        </p:txBody>
+      </p:sp>
+      <p:sp>
+        <p:nvSpPr>
+          <p:cNvPr id="26" name="Rectangle 25"/>
+          <p:cNvSpPr/>
+          <p:nvPr/>
+        </p:nvSpPr>
+        <p:spPr>
+          <a:xfrm>
+            <a:off x="4687200" y="3732332"/>
+            <a:ext cx="40000" cy="1171166"/>
+          </a:xfrm>
+          <a:prstGeom prst="rect">
+            <a:avLst/>
+          </a:prstGeom>
+          <a:solidFill>
+            <a:srgbClr val="0097A7"/>
+          </a:solidFill>
+          <a:ln>
+            <a:noFill/>
+          </a:ln>
+        </p:spPr>
+        <p:style>
+          <a:lnRef idx="1">
+            <a:schemeClr val="accent1"/>
+          </a:lnRef>
+          <a:fillRef idx="3">
+            <a:schemeClr val="accent1"/>
+          </a:fillRef>
+          <a:effectRef idx="2">
+            <a:schemeClr val="accent1"/>
+          </a:effectRef>
+          <a:fontRef idx="minor">
+            <a:schemeClr val="lt1"/>
+          </a:fontRef>
+        </p:style>
+        <p:txBody>
+          <a:bodyPr rtlCol="0" anchor="ctr"/>
+          <a:lstStyle/>
+          <a:p>
+            <a:pPr algn="ctr"/>
+          </a:p>
+        </p:txBody>
+      </p:sp>
+      <p:sp>
+        <p:nvSpPr>
+          <p:cNvPr id="27" name="TextBox 26"/>
+          <p:cNvSpPr txBox="1"/>
+          <p:nvPr/>
+        </p:nvSpPr>
+        <p:spPr>
+          <a:xfrm>
+            <a:off x="4747200" y="4137915"/>
+            <a:ext cx="420000" cy="360000"/>
+          </a:xfrm>
+          <a:prstGeom prst="rect">
+            <a:avLst/>
+          </a:prstGeom>
+          <a:noFill/>
+        </p:spPr>
+        <p:txBody>
+          <a:bodyPr wrap="square"/>
+          <a:lstStyle/>
+          <a:p>
+            <a:pPr algn="ctr"/>
+            <a:r>
+              <a:rPr sz="1800" b="1">
+                <a:solidFill>
+                  <a:srgbClr val="0097A7"/>
+                </a:solidFill>
+                <a:latin typeface="Helvetica Neue"/>
+              </a:rPr>
+              <a:t>06</a:t>
+            </a:r>
+          </a:p>
+        </p:txBody>
+      </p:sp>
+      <p:sp>
+        <p:nvSpPr>
+          <p:cNvPr id="28" name="TextBox 27"/>
+          <p:cNvSpPr txBox="1"/>
+          <p:nvPr/>
+        </p:nvSpPr>
+        <p:spPr>
+          <a:xfrm>
+            <a:off x="5147200" y="4117915"/>
+            <a:ext cx="3460000" cy="400000"/>
+          </a:xfrm>
+          <a:prstGeom prst="rect">
+            <a:avLst/>
+          </a:prstGeom>
+          <a:noFill/>
+        </p:spPr>
+        <p:txBody>
+          <a:bodyPr wrap="square"/>
+          <a:lstStyle/>
+          <a:p>
+            <a:pPr algn="l"/>
+            <a:r>
+              <a:rPr sz="2200" b="1">
+                <a:solidFill>
+                  <a:srgbClr val="212121"/>
+                </a:solidFill>
+                <a:latin typeface="Helvetica Neue"/>
+              </a:rPr>
+              <a:t>Cocotb</a:t>
+            </a:r>
+          </a:p>
+        </p:txBody>
+      </p:sp>
     </p:spTree>
   </p:cSld>
   <p:clrMapOvr>
